--- a/DP PPT.pptx
+++ b/DP PPT.pptx
@@ -16892,11 +16892,18 @@
               <a:buSzPts val="2400"/>
             </a:pPr>
             <a:r>
+              <a:rPr lang="en-IN" sz="2400" b="1">
+                <a:latin typeface="Times New Roman" panose="02020603050405020304" pitchFamily="18" charset="0"/>
+                <a:cs typeface="Times New Roman" panose="02020603050405020304" pitchFamily="18" charset="0"/>
+              </a:rPr>
+              <a:t>AMB1331 </a:t>
+            </a:r>
+            <a:r>
               <a:rPr lang="en-IN" sz="2400" b="1" dirty="0">
                 <a:latin typeface="Times New Roman" panose="02020603050405020304" pitchFamily="18" charset="0"/>
                 <a:cs typeface="Times New Roman" panose="02020603050405020304" pitchFamily="18" charset="0"/>
               </a:rPr>
-              <a:t>ADB1331 – DESIGN PROJECT</a:t>
+              <a:t>– DESIGN PROJECT</a:t>
             </a:r>
             <a:endParaRPr lang="en-IN" sz="2400" b="1" i="0" u="none" strike="noStrike" cap="none" dirty="0">
               <a:solidFill>
